--- a/lecture_pptx/out/s17/ワーク01_講師用.pptx
+++ b/lecture_pptx/out/s17/ワーク01_講師用.pptx
@@ -1106,7 +1106,7 @@
                 <a:ea typeface="Yu Gothic UI Semibold" pitchFamily="34" charset="-122"/>
                 <a:cs typeface="Yu Gothic UI Semibold" pitchFamily="34" charset="-120"/>
               </a:rPr>
-              <a:t>ライフプランAIヒアリング設計</a:t>
+              <a:t>ライフプランAIの 入出力を設計する</a:t>
             </a:r>
             <a:endParaRPr lang="en-US" sz="3800" dirty="0"/>
           </a:p>
@@ -1145,7 +1145,7 @@
                 <a:ea typeface="Yu Gothic UI" pitchFamily="34" charset="-122"/>
                 <a:cs typeface="Yu Gothic UI" pitchFamily="34" charset="-120"/>
               </a:rPr>
-              <a:t>聞き漏れゼロの30項目+数値化ロジックを設計</a:t>
+              <a:t>顧客カルテ(入力)+ 40年CF表・提案フック(出力)+ 前提テーブル の3点セットを固める</a:t>
             </a:r>
             <a:endParaRPr lang="en-US" sz="1900" dirty="0"/>
           </a:p>
@@ -1275,7 +1275,7 @@
                 <a:ea typeface="Yu Gothic UI Semibold" pitchFamily="34" charset="-122"/>
                 <a:cs typeface="Yu Gothic UI Semibold" pitchFamily="34" charset="-120"/>
               </a:rPr>
-              <a:t>演習1 ヒアリング項目を AI と整理 — 解答・指導ポイント</a:t>
+              <a:t>演習1 顧客カルテ(入力)と前提テーブルを設計 — 解答・指導ポイント</a:t>
             </a:r>
             <a:endParaRPr lang="en-US" sz="2600" dirty="0"/>
           </a:p>
@@ -1442,107 +1442,156 @@
                 <a:ea typeface="Yu Gothic UI" pitchFamily="34" charset="-122"/>
                 <a:cs typeface="Yu Gothic UI" pitchFamily="34" charset="-120"/>
               </a:rPr>
-              <a:t>【貼り付け用】</a:t>
-            </a:r>
-            <a:endParaRPr lang="en-US" sz="1400" dirty="0"/>
-          </a:p>
-          <a:p>
-            <a:pPr indent="0" marL="0">
-              <a:spcAft>
-                <a:spcPts val="400"/>
-              </a:spcAft>
-              <a:buNone/>
-            </a:pPr>
-            <a:r>
-              <a:rPr lang="en-US" sz="1400" dirty="0">
-                <a:solidFill>
-                  <a:srgbClr val="1A1A1A"/>
-                </a:solidFill>
-                <a:latin typeface="Yu Gothic UI" pitchFamily="34" charset="0"/>
-                <a:ea typeface="Yu Gothic UI" pitchFamily="34" charset="-122"/>
-                <a:cs typeface="Yu Gothic UI" pitchFamily="34" charset="-120"/>
-              </a:rPr>
-              <a:t>保険営業のライフプラン作成用ヒアリング項目を30項目作って。</a:t>
-            </a:r>
-            <a:endParaRPr lang="en-US" sz="1400" dirty="0"/>
-          </a:p>
-          <a:p>
-            <a:pPr indent="0" marL="0">
-              <a:spcAft>
-                <a:spcPts val="400"/>
-              </a:spcAft>
-              <a:buNone/>
-            </a:pPr>
-            <a:r>
-              <a:rPr lang="en-US" sz="1400" dirty="0">
-                <a:solidFill>
-                  <a:srgbClr val="1A1A1A"/>
-                </a:solidFill>
-                <a:latin typeface="Yu Gothic UI" pitchFamily="34" charset="0"/>
-                <a:ea typeface="Yu Gothic UI" pitchFamily="34" charset="-122"/>
-                <a:cs typeface="Yu Gothic UI" pitchFamily="34" charset="-120"/>
-              </a:rPr>
-              <a:t>・4カテゴリ(基本/家族/資産/不安)</a:t>
-            </a:r>
-            <a:endParaRPr lang="en-US" sz="1400" dirty="0"/>
-          </a:p>
-          <a:p>
-            <a:pPr indent="0" marL="0">
-              <a:spcAft>
-                <a:spcPts val="400"/>
-              </a:spcAft>
-              <a:buNone/>
-            </a:pPr>
-            <a:r>
-              <a:rPr lang="en-US" sz="1400" dirty="0">
-                <a:solidFill>
-                  <a:srgbClr val="1A1A1A"/>
-                </a:solidFill>
-                <a:latin typeface="Yu Gothic UI" pitchFamily="34" charset="0"/>
-                <a:ea typeface="Yu Gothic UI" pitchFamily="34" charset="-122"/>
-                <a:cs typeface="Yu Gothic UI" pitchFamily="34" charset="-120"/>
-              </a:rPr>
-              <a:t>・各項目: 1問1答</a:t>
-            </a:r>
-            <a:endParaRPr lang="en-US" sz="1400" dirty="0"/>
-          </a:p>
-          <a:p>
-            <a:pPr indent="0" marL="0">
-              <a:spcAft>
-                <a:spcPts val="400"/>
-              </a:spcAft>
-              <a:buNone/>
-            </a:pPr>
-            <a:r>
-              <a:rPr lang="en-US" sz="1400" dirty="0">
-                <a:solidFill>
-                  <a:srgbClr val="1A1A1A"/>
-                </a:solidFill>
-                <a:latin typeface="Yu Gothic UI" pitchFamily="34" charset="0"/>
-                <a:ea typeface="Yu Gothic UI" pitchFamily="34" charset="-122"/>
-                <a:cs typeface="Yu Gothic UI" pitchFamily="34" charset="-120"/>
-              </a:rPr>
-              <a:t>・法令上必要な項目を必ず含む</a:t>
-            </a:r>
-            <a:endParaRPr lang="en-US" sz="1400" dirty="0"/>
-          </a:p>
-          <a:p>
-            <a:pPr indent="0" marL="0">
-              <a:spcAft>
-                <a:spcPts val="400"/>
-              </a:spcAft>
-              <a:buNone/>
-            </a:pPr>
-            <a:r>
-              <a:rPr lang="en-US" sz="1400" dirty="0">
-                <a:solidFill>
-                  <a:srgbClr val="1A1A1A"/>
-                </a:solidFill>
-                <a:latin typeface="Yu Gothic UI" pitchFamily="34" charset="0"/>
-                <a:ea typeface="Yu Gothic UI" pitchFamily="34" charset="-122"/>
-                <a:cs typeface="Yu Gothic UI" pitchFamily="34" charset="-120"/>
-              </a:rPr>
-              <a:t>・聞きやすい順に並べる</a:t>
+              <a:t>【生徒への声かけ例】</a:t>
+            </a:r>
+            <a:endParaRPr lang="en-US" sz="1400" dirty="0"/>
+          </a:p>
+          <a:p>
+            <a:pPr indent="0" marL="0">
+              <a:spcAft>
+                <a:spcPts val="400"/>
+              </a:spcAft>
+              <a:buNone/>
+            </a:pPr>
+            <a:r>
+              <a:rPr lang="en-US" sz="1400" dirty="0">
+                <a:solidFill>
+                  <a:srgbClr val="1A1A1A"/>
+                </a:solidFill>
+                <a:latin typeface="Yu Gothic UI" pitchFamily="34" charset="0"/>
+                <a:ea typeface="Yu Gothic UI" pitchFamily="34" charset="-122"/>
+                <a:cs typeface="Yu Gothic UI" pitchFamily="34" charset="-120"/>
+              </a:rPr>
+              <a:t>・「顧客カルテ_記入例 シートを開いて、5分眺めてから 顧客カルテを埋め始めて」</a:t>
+            </a:r>
+            <a:endParaRPr lang="en-US" sz="1400" dirty="0"/>
+          </a:p>
+          <a:p>
+            <a:pPr indent="0" marL="0">
+              <a:spcAft>
+                <a:spcPts val="400"/>
+              </a:spcAft>
+              <a:buNone/>
+            </a:pPr>
+            <a:r>
+              <a:rPr lang="en-US" sz="1400" dirty="0">
+                <a:solidFill>
+                  <a:srgbClr val="1A1A1A"/>
+                </a:solidFill>
+                <a:latin typeface="Yu Gothic UI" pitchFamily="34" charset="0"/>
+                <a:ea typeface="Yu Gothic UI" pitchFamily="34" charset="-122"/>
+                <a:cs typeface="Yu Gothic UI" pitchFamily="34" charset="-120"/>
+              </a:rPr>
+              <a:t>・「数値は全て 万円単位。年収600万は 600 と書く」</a:t>
+            </a:r>
+            <a:endParaRPr lang="en-US" sz="1400" dirty="0"/>
+          </a:p>
+          <a:p>
+            <a:pPr indent="0" marL="0">
+              <a:spcAft>
+                <a:spcPts val="400"/>
+              </a:spcAft>
+              <a:buNone/>
+            </a:pPr>
+            <a:r>
+              <a:rPr lang="en-US" sz="1400" dirty="0">
+                <a:solidFill>
+                  <a:srgbClr val="1A1A1A"/>
+                </a:solidFill>
+                <a:latin typeface="Yu Gothic UI" pitchFamily="34" charset="0"/>
+                <a:ea typeface="Yu Gothic UI" pitchFamily="34" charset="-122"/>
+                <a:cs typeface="Yu Gothic UI" pitchFamily="34" charset="-120"/>
+              </a:rPr>
+              <a:t>・「子ども③がいない人は "なし" と書く(空欄でも良いが明示的な方が AI が誤解しない)」</a:t>
+            </a:r>
+            <a:endParaRPr lang="en-US" sz="1400" dirty="0"/>
+          </a:p>
+          <a:p>
+            <a:pPr indent="0" marL="0">
+              <a:spcAft>
+                <a:spcPts val="400"/>
+              </a:spcAft>
+              <a:buNone/>
+            </a:pPr>
+            <a:r>
+              <a:rPr lang="en-US" sz="1400" dirty="0">
+                <a:solidFill>
+                  <a:srgbClr val="1A1A1A"/>
+                </a:solidFill>
+                <a:latin typeface="Yu Gothic UI" pitchFamily="34" charset="0"/>
+                <a:ea typeface="Yu Gothic UI" pitchFamily="34" charset="-122"/>
+                <a:cs typeface="Yu Gothic UI" pitchFamily="34" charset="-120"/>
+              </a:rPr>
+              <a:t>・「前提テーブル は今日は 眺めるだけでOK、月1回 見直し担当を決めるところまで」</a:t>
+            </a:r>
+            <a:endParaRPr lang="en-US" sz="1400" dirty="0"/>
+          </a:p>
+          <a:p>
+            <a:pPr indent="0" marL="0">
+              <a:spcAft>
+                <a:spcPts val="400"/>
+              </a:spcAft>
+              <a:buNone/>
+            </a:pPr>
+            <a:endParaRPr lang="en-US" sz="1400" dirty="0"/>
+          </a:p>
+          <a:p>
+            <a:pPr indent="0" marL="0">
+              <a:spcAft>
+                <a:spcPts val="400"/>
+              </a:spcAft>
+              <a:buNone/>
+            </a:pPr>
+            <a:r>
+              <a:rPr lang="en-US" sz="1400" dirty="0">
+                <a:solidFill>
+                  <a:srgbClr val="1A1A1A"/>
+                </a:solidFill>
+                <a:latin typeface="Yu Gothic UI" pitchFamily="34" charset="0"/>
+                <a:ea typeface="Yu Gothic UI" pitchFamily="34" charset="-122"/>
+                <a:cs typeface="Yu Gothic UI" pitchFamily="34" charset="-120"/>
+              </a:rPr>
+              <a:t>【生徒が Gemini に投げる相談例】</a:t>
+            </a:r>
+            <a:endParaRPr lang="en-US" sz="1400" dirty="0"/>
+          </a:p>
+          <a:p>
+            <a:pPr indent="0" marL="0">
+              <a:spcAft>
+                <a:spcPts val="400"/>
+              </a:spcAft>
+              <a:buNone/>
+            </a:pPr>
+            <a:r>
+              <a:rPr lang="en-US" sz="1400" dirty="0">
+                <a:solidFill>
+                  <a:srgbClr val="1A1A1A"/>
+                </a:solidFill>
+                <a:latin typeface="Yu Gothic UI" pitchFamily="34" charset="0"/>
+                <a:ea typeface="Yu Gothic UI" pitchFamily="34" charset="-122"/>
+                <a:cs typeface="Yu Gothic UI" pitchFamily="34" charset="-120"/>
+              </a:rPr>
+              <a:t>「既存の30項目ヒアリング(貼付)を、AIが計算できる縦2列テンプレに整理して。</a:t>
+            </a:r>
+            <a:endParaRPr lang="en-US" sz="1400" dirty="0"/>
+          </a:p>
+          <a:p>
+            <a:pPr indent="0" marL="0">
+              <a:spcAft>
+                <a:spcPts val="400"/>
+              </a:spcAft>
+              <a:buNone/>
+            </a:pPr>
+            <a:r>
+              <a:rPr lang="en-US" sz="1400" dirty="0">
+                <a:solidFill>
+                  <a:srgbClr val="1A1A1A"/>
+                </a:solidFill>
+                <a:latin typeface="Yu Gothic UI" pitchFamily="34" charset="0"/>
+                <a:ea typeface="Yu Gothic UI" pitchFamily="34" charset="-122"/>
+                <a:cs typeface="Yu Gothic UI" pitchFamily="34" charset="-120"/>
+              </a:rPr>
+              <a:t> 万円単位で統一、自由記述は "リスク" "要望" の2欄に集約」</a:t>
             </a:r>
             <a:endParaRPr lang="en-US" sz="1400" dirty="0"/>
           </a:p>
@@ -1670,7 +1719,67 @@
                 <a:ea typeface="Yu Gothic UI" pitchFamily="34" charset="-122"/>
                 <a:cs typeface="Yu Gothic UI" pitchFamily="34" charset="-120"/>
               </a:rPr>
-              <a:t>・30項目ヒアリングシート(カテゴリ/質問/回答欄)</a:t>
+              <a:t>・「顧客カルテ」シートが 6セクション 縦3列で完成</a:t>
+            </a:r>
+            <a:endParaRPr lang="en-US" sz="1400" dirty="0"/>
+          </a:p>
+          <a:p>
+            <a:pPr indent="0" marL="0">
+              <a:spcAft>
+                <a:spcPts val="400"/>
+              </a:spcAft>
+              <a:buNone/>
+            </a:pPr>
+            <a:r>
+              <a:rPr lang="en-US" sz="1400" dirty="0">
+                <a:solidFill>
+                  <a:srgbClr val="1A1A1A"/>
+                </a:solidFill>
+                <a:latin typeface="Yu Gothic UI" pitchFamily="34" charset="0"/>
+                <a:ea typeface="Yu Gothic UI" pitchFamily="34" charset="-122"/>
+                <a:cs typeface="Yu Gothic UI" pitchFamily="34" charset="-120"/>
+              </a:rPr>
+              <a:t>・「顧客カルテ_記入例」を眺めて 数値の書き方に納得している</a:t>
+            </a:r>
+            <a:endParaRPr lang="en-US" sz="1400" dirty="0"/>
+          </a:p>
+          <a:p>
+            <a:pPr indent="0" marL="0">
+              <a:spcAft>
+                <a:spcPts val="400"/>
+              </a:spcAft>
+              <a:buNone/>
+            </a:pPr>
+            <a:r>
+              <a:rPr lang="en-US" sz="1400" dirty="0">
+                <a:solidFill>
+                  <a:srgbClr val="1A1A1A"/>
+                </a:solidFill>
+                <a:latin typeface="Yu Gothic UI" pitchFamily="34" charset="0"/>
+                <a:ea typeface="Yu Gothic UI" pitchFamily="34" charset="-122"/>
+                <a:cs typeface="Yu Gothic UI" pitchFamily="34" charset="-120"/>
+              </a:rPr>
+              <a:t>・「前提テーブル」の月次見直し担当者を決めた</a:t>
+            </a:r>
+            <a:endParaRPr lang="en-US" sz="1400" dirty="0"/>
+          </a:p>
+          <a:p>
+            <a:pPr indent="0" marL="0">
+              <a:spcAft>
+                <a:spcPts val="400"/>
+              </a:spcAft>
+              <a:buNone/>
+            </a:pPr>
+            <a:r>
+              <a:rPr lang="en-US" sz="1400" dirty="0">
+                <a:solidFill>
+                  <a:srgbClr val="1A1A1A"/>
+                </a:solidFill>
+                <a:latin typeface="Yu Gothic UI" pitchFamily="34" charset="0"/>
+                <a:ea typeface="Yu Gothic UI" pitchFamily="34" charset="-122"/>
+                <a:cs typeface="Yu Gothic UI" pitchFamily="34" charset="-120"/>
+              </a:rPr>
+              <a:t>・第15回マスタ表(引受判定)との接続案が話し合われている</a:t>
             </a:r>
             <a:endParaRPr lang="en-US" sz="1400" dirty="0"/>
           </a:p>
@@ -1798,47 +1907,67 @@
                 <a:ea typeface="Yu Gothic UI" pitchFamily="34" charset="-122"/>
                 <a:cs typeface="Yu Gothic UI" pitchFamily="34" charset="-120"/>
               </a:rPr>
-              <a:t>・「全部聞く」と圧迫感。優先度で選別する考えも伝える。</a:t>
-            </a:r>
-            <a:endParaRPr lang="en-US" sz="1400" dirty="0"/>
-          </a:p>
-          <a:p>
-            <a:pPr indent="0" marL="0">
-              <a:spcAft>
-                <a:spcPts val="400"/>
-              </a:spcAft>
-              <a:buNone/>
-            </a:pPr>
-            <a:r>
-              <a:rPr lang="en-US" sz="1400" dirty="0">
-                <a:solidFill>
-                  <a:srgbClr val="1A1A1A"/>
-                </a:solidFill>
-                <a:latin typeface="Yu Gothic UI" pitchFamily="34" charset="0"/>
-                <a:ea typeface="Yu Gothic UI" pitchFamily="34" charset="-122"/>
-                <a:cs typeface="Yu Gothic UI" pitchFamily="34" charset="-120"/>
-              </a:rPr>
-              <a:t>・1問1答を徹底。複合質問は混乱の元。</a:t>
-            </a:r>
-            <a:endParaRPr lang="en-US" sz="1400" dirty="0"/>
-          </a:p>
-          <a:p>
-            <a:pPr indent="0" marL="0">
-              <a:spcAft>
-                <a:spcPts val="400"/>
-              </a:spcAft>
-              <a:buNone/>
-            </a:pPr>
-            <a:r>
-              <a:rPr lang="en-US" sz="1400" dirty="0">
-                <a:solidFill>
-                  <a:srgbClr val="1A1A1A"/>
-                </a:solidFill>
-                <a:latin typeface="Yu Gothic UI" pitchFamily="34" charset="0"/>
-                <a:ea typeface="Yu Gothic UI" pitchFamily="34" charset="-122"/>
-                <a:cs typeface="Yu Gothic UI" pitchFamily="34" charset="-120"/>
-              </a:rPr>
-              <a:t>・社内ルール(必須項目)を最初に確認。</a:t>
+              <a:t>・「全部の項目を今日埋めなくて良い」と伝える。テンプレの構造 と 記入例の書き方 が掴めれば OK。</a:t>
+            </a:r>
+            <a:endParaRPr lang="en-US" sz="1400" dirty="0"/>
+          </a:p>
+          <a:p>
+            <a:pPr indent="0" marL="0">
+              <a:spcAft>
+                <a:spcPts val="400"/>
+              </a:spcAft>
+              <a:buNone/>
+            </a:pPr>
+            <a:r>
+              <a:rPr lang="en-US" sz="1400" dirty="0">
+                <a:solidFill>
+                  <a:srgbClr val="1A1A1A"/>
+                </a:solidFill>
+                <a:latin typeface="Yu Gothic UI" pitchFamily="34" charset="0"/>
+                <a:ea typeface="Yu Gothic UI" pitchFamily="34" charset="-122"/>
+                <a:cs typeface="Yu Gothic UI" pitchFamily="34" charset="-120"/>
+              </a:rPr>
+              <a:t>・数値と自由記述の混在を避ける。数値項目は数値、自由記述は "リスク・要望" 欄に集約。</a:t>
+            </a:r>
+            <a:endParaRPr lang="en-US" sz="1400" dirty="0"/>
+          </a:p>
+          <a:p>
+            <a:pPr indent="0" marL="0">
+              <a:spcAft>
+                <a:spcPts val="400"/>
+              </a:spcAft>
+              <a:buNone/>
+            </a:pPr>
+            <a:r>
+              <a:rPr lang="en-US" sz="1400" dirty="0">
+                <a:solidFill>
+                  <a:srgbClr val="1A1A1A"/>
+                </a:solidFill>
+                <a:latin typeface="Yu Gothic UI" pitchFamily="34" charset="0"/>
+                <a:ea typeface="Yu Gothic UI" pitchFamily="34" charset="-122"/>
+                <a:cs typeface="Yu Gothic UI" pitchFamily="34" charset="-120"/>
+              </a:rPr>
+              <a:t>・前提テーブルの数値は 実際の相場と乖離がないか、生徒に文科省/厚労省サイトで検証させても良い。</a:t>
+            </a:r>
+            <a:endParaRPr lang="en-US" sz="1400" dirty="0"/>
+          </a:p>
+          <a:p>
+            <a:pPr indent="0" marL="0">
+              <a:spcAft>
+                <a:spcPts val="400"/>
+              </a:spcAft>
+              <a:buNone/>
+            </a:pPr>
+            <a:r>
+              <a:rPr lang="en-US" sz="1400" dirty="0">
+                <a:solidFill>
+                  <a:srgbClr val="1A1A1A"/>
+                </a:solidFill>
+                <a:latin typeface="Yu Gothic UI" pitchFamily="34" charset="0"/>
+                <a:ea typeface="Yu Gothic UI" pitchFamily="34" charset="-122"/>
+                <a:cs typeface="Yu Gothic UI" pitchFamily="34" charset="-120"/>
+              </a:rPr>
+              <a:t>・第15回マスタ表を扱っている生徒には「product_type がどう接続できるか」を早めに議論。</a:t>
             </a:r>
             <a:endParaRPr lang="en-US" sz="1400" dirty="0"/>
           </a:p>
@@ -1929,7 +2058,7 @@
                 <a:ea typeface="Yu Gothic UI Semibold" pitchFamily="34" charset="-122"/>
                 <a:cs typeface="Yu Gothic UI Semibold" pitchFamily="34" charset="-120"/>
               </a:rPr>
-              <a:t>演習2 数値化ロジック — 解答・指導ポイント</a:t>
+              <a:t>演習2 出力(40年CF表 + サマリ + 保険提案フック)を設計 — 解答・指導ポイント</a:t>
             </a:r>
             <a:endParaRPr lang="en-US" sz="2600" dirty="0"/>
           </a:p>
@@ -2096,87 +2225,156 @@
                 <a:ea typeface="Yu Gothic UI" pitchFamily="34" charset="-122"/>
                 <a:cs typeface="Yu Gothic UI" pitchFamily="34" charset="-120"/>
               </a:rPr>
-              <a:t>【貼り付け用】</a:t>
-            </a:r>
-            <a:endParaRPr lang="en-US" sz="1400" dirty="0"/>
-          </a:p>
-          <a:p>
-            <a:pPr indent="0" marL="0">
-              <a:spcAft>
-                <a:spcPts val="400"/>
-              </a:spcAft>
-              <a:buNone/>
-            </a:pPr>
-            <a:r>
-              <a:rPr lang="en-US" sz="1400" dirty="0">
-                <a:solidFill>
-                  <a:srgbClr val="1A1A1A"/>
-                </a:solidFill>
-                <a:latin typeface="Yu Gothic UI" pitchFamily="34" charset="0"/>
-                <a:ea typeface="Yu Gothic UI" pitchFamily="34" charset="-122"/>
-                <a:cs typeface="Yu Gothic UI" pitchFamily="34" charset="-120"/>
-              </a:rPr>
-              <a:t>教育/老後/医療 の不足額計算ロジックを作って。</a:t>
-            </a:r>
-            <a:endParaRPr lang="en-US" sz="1400" dirty="0"/>
-          </a:p>
-          <a:p>
-            <a:pPr indent="0" marL="0">
-              <a:spcAft>
-                <a:spcPts val="400"/>
-              </a:spcAft>
-              <a:buNone/>
-            </a:pPr>
-            <a:r>
-              <a:rPr lang="en-US" sz="1400" dirty="0">
-                <a:solidFill>
-                  <a:srgbClr val="1A1A1A"/>
-                </a:solidFill>
-                <a:latin typeface="Yu Gothic UI" pitchFamily="34" charset="0"/>
-                <a:ea typeface="Yu Gothic UI" pitchFamily="34" charset="-122"/>
-                <a:cs typeface="Yu Gothic UI" pitchFamily="34" charset="-120"/>
-              </a:rPr>
-              <a:t>・各カテゴリの前提条件(年金月額/学費平均 等)</a:t>
-            </a:r>
-            <a:endParaRPr lang="en-US" sz="1400" dirty="0"/>
-          </a:p>
-          <a:p>
-            <a:pPr indent="0" marL="0">
-              <a:spcAft>
-                <a:spcPts val="400"/>
-              </a:spcAft>
-              <a:buNone/>
-            </a:pPr>
-            <a:r>
-              <a:rPr lang="en-US" sz="1400" dirty="0">
-                <a:solidFill>
-                  <a:srgbClr val="1A1A1A"/>
-                </a:solidFill>
-                <a:latin typeface="Yu Gothic UI" pitchFamily="34" charset="0"/>
-                <a:ea typeface="Yu Gothic UI" pitchFamily="34" charset="-122"/>
-                <a:cs typeface="Yu Gothic UI" pitchFamily="34" charset="-120"/>
-              </a:rPr>
-              <a:t>・Excel関数で再現可能な数式</a:t>
-            </a:r>
-            <a:endParaRPr lang="en-US" sz="1400" dirty="0"/>
-          </a:p>
-          <a:p>
-            <a:pPr indent="0" marL="0">
-              <a:spcAft>
-                <a:spcPts val="400"/>
-              </a:spcAft>
-              <a:buNone/>
-            </a:pPr>
-            <a:r>
-              <a:rPr lang="en-US" sz="1400" dirty="0">
-                <a:solidFill>
-                  <a:srgbClr val="1A1A1A"/>
-                </a:solidFill>
-                <a:latin typeface="Yu Gothic UI" pitchFamily="34" charset="0"/>
-                <a:ea typeface="Yu Gothic UI" pitchFamily="34" charset="-122"/>
-                <a:cs typeface="Yu Gothic UI" pitchFamily="34" charset="-120"/>
-              </a:rPr>
-              <a:t>・出力は赤/黄/緑 信号で見せられる形</a:t>
+              <a:t>【生徒への声かけ例】</a:t>
+            </a:r>
+            <a:endParaRPr lang="en-US" sz="1400" dirty="0"/>
+          </a:p>
+          <a:p>
+            <a:pPr indent="0" marL="0">
+              <a:spcAft>
+                <a:spcPts val="400"/>
+              </a:spcAft>
+              <a:buNone/>
+            </a:pPr>
+            <a:r>
+              <a:rPr lang="en-US" sz="1400" dirty="0">
+                <a:solidFill>
+                  <a:srgbClr val="1A1A1A"/>
+                </a:solidFill>
+                <a:latin typeface="Yu Gothic UI" pitchFamily="34" charset="0"/>
+                <a:ea typeface="Yu Gothic UI" pitchFamily="34" charset="-122"/>
+                <a:cs typeface="Yu Gothic UI" pitchFamily="34" charset="-120"/>
+              </a:rPr>
+              <a:t>・「シミュレーション結果_サンプル シートを開いて、40年ぶんのCF表を見てみて」</a:t>
+            </a:r>
+            <a:endParaRPr lang="en-US" sz="1400" dirty="0"/>
+          </a:p>
+          <a:p>
+            <a:pPr indent="0" marL="0">
+              <a:spcAft>
+                <a:spcPts val="400"/>
+              </a:spcAft>
+              <a:buNone/>
+            </a:pPr>
+            <a:r>
+              <a:rPr lang="en-US" sz="1400" dirty="0">
+                <a:solidFill>
+                  <a:srgbClr val="1A1A1A"/>
+                </a:solidFill>
+                <a:latin typeface="Yu Gothic UI" pitchFamily="34" charset="0"/>
+                <a:ea typeface="Yu Gothic UI" pitchFamily="34" charset="-122"/>
+                <a:cs typeface="Yu Gothic UI" pitchFamily="34" charset="-120"/>
+              </a:rPr>
+              <a:t>・「これが AI から返ってくる想定の形。8列・サマリ5項目・保険フック3〜5件」</a:t>
+            </a:r>
+            <a:endParaRPr lang="en-US" sz="1400" dirty="0"/>
+          </a:p>
+          <a:p>
+            <a:pPr indent="0" marL="0">
+              <a:spcAft>
+                <a:spcPts val="400"/>
+              </a:spcAft>
+              <a:buNone/>
+            </a:pPr>
+            <a:r>
+              <a:rPr lang="en-US" sz="1400" dirty="0">
+                <a:solidFill>
+                  <a:srgbClr val="1A1A1A"/>
+                </a:solidFill>
+                <a:latin typeface="Yu Gothic UI" pitchFamily="34" charset="0"/>
+                <a:ea typeface="Yu Gothic UI" pitchFamily="34" charset="-122"/>
+                <a:cs typeface="Yu Gothic UI" pitchFamily="34" charset="-120"/>
+              </a:rPr>
+              <a:t>・「あなたの代理店で使う場合、この列で足りる?増やしたい列は?」</a:t>
+            </a:r>
+            <a:endParaRPr lang="en-US" sz="1400" dirty="0"/>
+          </a:p>
+          <a:p>
+            <a:pPr indent="0" marL="0">
+              <a:spcAft>
+                <a:spcPts val="400"/>
+              </a:spcAft>
+              <a:buNone/>
+            </a:pPr>
+            <a:r>
+              <a:rPr lang="en-US" sz="1400" dirty="0">
+                <a:solidFill>
+                  <a:srgbClr val="1A1A1A"/>
+                </a:solidFill>
+                <a:latin typeface="Yu Gothic UI" pitchFamily="34" charset="0"/>
+                <a:ea typeface="Yu Gothic UI" pitchFamily="34" charset="-122"/>
+                <a:cs typeface="Yu Gothic UI" pitchFamily="34" charset="-120"/>
+              </a:rPr>
+              <a:t>・「保険提案フックの product_type は "学資保険" "就業不能保険" などの タイプ。特定商品名は書かない、それは第15回マスタ表の仕事」</a:t>
+            </a:r>
+            <a:endParaRPr lang="en-US" sz="1400" dirty="0"/>
+          </a:p>
+          <a:p>
+            <a:pPr indent="0" marL="0">
+              <a:spcAft>
+                <a:spcPts val="400"/>
+              </a:spcAft>
+              <a:buNone/>
+            </a:pPr>
+            <a:endParaRPr lang="en-US" sz="1400" dirty="0"/>
+          </a:p>
+          <a:p>
+            <a:pPr indent="0" marL="0">
+              <a:spcAft>
+                <a:spcPts val="400"/>
+              </a:spcAft>
+              <a:buNone/>
+            </a:pPr>
+            <a:r>
+              <a:rPr lang="en-US" sz="1400" dirty="0">
+                <a:solidFill>
+                  <a:srgbClr val="1A1A1A"/>
+                </a:solidFill>
+                <a:latin typeface="Yu Gothic UI" pitchFamily="34" charset="0"/>
+                <a:ea typeface="Yu Gothic UI" pitchFamily="34" charset="-122"/>
+                <a:cs typeface="Yu Gothic UI" pitchFamily="34" charset="-120"/>
+              </a:rPr>
+              <a:t>【生徒が Gemini に投げる相談例】</a:t>
+            </a:r>
+            <a:endParaRPr lang="en-US" sz="1400" dirty="0"/>
+          </a:p>
+          <a:p>
+            <a:pPr indent="0" marL="0">
+              <a:spcAft>
+                <a:spcPts val="400"/>
+              </a:spcAft>
+              <a:buNone/>
+            </a:pPr>
+            <a:r>
+              <a:rPr lang="en-US" sz="1400" dirty="0">
+                <a:solidFill>
+                  <a:srgbClr val="1A1A1A"/>
+                </a:solidFill>
+                <a:latin typeface="Yu Gothic UI" pitchFamily="34" charset="0"/>
+                <a:ea typeface="Yu Gothic UI" pitchFamily="34" charset="-122"/>
+                <a:cs typeface="Yu Gothic UI" pitchFamily="34" charset="-120"/>
+              </a:rPr>
+              <a:t>「保険代理店で 40年ライフプランCF を出す時、どんな出力設計が理想?</a:t>
+            </a:r>
+            <a:endParaRPr lang="en-US" sz="1400" dirty="0"/>
+          </a:p>
+          <a:p>
+            <a:pPr indent="0" marL="0">
+              <a:spcAft>
+                <a:spcPts val="400"/>
+              </a:spcAft>
+              <a:buNone/>
+            </a:pPr>
+            <a:r>
+              <a:rPr lang="en-US" sz="1400" dirty="0">
+                <a:solidFill>
+                  <a:srgbClr val="1A1A1A"/>
+                </a:solidFill>
+                <a:latin typeface="Yu Gothic UI" pitchFamily="34" charset="0"/>
+                <a:ea typeface="Yu Gothic UI" pitchFamily="34" charset="-122"/>
+                <a:cs typeface="Yu Gothic UI" pitchFamily="34" charset="-120"/>
+              </a:rPr>
+              <a:t> 8列のCF表 + サマリ + 保険提案フック の骨格でレビューして、抜けている観点を教えて」</a:t>
             </a:r>
             <a:endParaRPr lang="en-US" sz="1400" dirty="0"/>
           </a:p>
@@ -2304,27 +2502,67 @@
                 <a:ea typeface="Yu Gothic UI" pitchFamily="34" charset="-122"/>
                 <a:cs typeface="Yu Gothic UI" pitchFamily="34" charset="-120"/>
               </a:rPr>
-              <a:t>・3カテゴリの計算ロジック</a:t>
-            </a:r>
-            <a:endParaRPr lang="en-US" sz="1400" dirty="0"/>
-          </a:p>
-          <a:p>
-            <a:pPr indent="0" marL="0">
-              <a:spcAft>
-                <a:spcPts val="400"/>
-              </a:spcAft>
-              <a:buNone/>
-            </a:pPr>
-            <a:r>
-              <a:rPr lang="en-US" sz="1400" dirty="0">
-                <a:solidFill>
-                  <a:srgbClr val="1A1A1A"/>
-                </a:solidFill>
-                <a:latin typeface="Yu Gothic UI" pitchFamily="34" charset="0"/>
-                <a:ea typeface="Yu Gothic UI" pitchFamily="34" charset="-122"/>
-                <a:cs typeface="Yu Gothic UI" pitchFamily="34" charset="-120"/>
-              </a:rPr>
-              <a:t>・ダミーデータで試算結果</a:t>
+              <a:t>・「出力設計」シートを眺めて、CF表8列/サマリ5項目/保険フック4列 が理解できている</a:t>
+            </a:r>
+            <a:endParaRPr lang="en-US" sz="1400" dirty="0"/>
+          </a:p>
+          <a:p>
+            <a:pPr indent="0" marL="0">
+              <a:spcAft>
+                <a:spcPts val="400"/>
+              </a:spcAft>
+              <a:buNone/>
+            </a:pPr>
+            <a:r>
+              <a:rPr lang="en-US" sz="1400" dirty="0">
+                <a:solidFill>
+                  <a:srgbClr val="1A1A1A"/>
+                </a:solidFill>
+                <a:latin typeface="Yu Gothic UI" pitchFamily="34" charset="0"/>
+                <a:ea typeface="Yu Gothic UI" pitchFamily="34" charset="-122"/>
+                <a:cs typeface="Yu Gothic UI" pitchFamily="34" charset="-120"/>
+              </a:rPr>
+              <a:t>・自社独自の列追加案が 1〜2件出ている(例: 「税・社保引後の手取り列」等)</a:t>
+            </a:r>
+            <a:endParaRPr lang="en-US" sz="1400" dirty="0"/>
+          </a:p>
+          <a:p>
+            <a:pPr indent="0" marL="0">
+              <a:spcAft>
+                <a:spcPts val="400"/>
+              </a:spcAft>
+              <a:buNone/>
+            </a:pPr>
+            <a:r>
+              <a:rPr lang="en-US" sz="1400" dirty="0">
+                <a:solidFill>
+                  <a:srgbClr val="1A1A1A"/>
+                </a:solidFill>
+                <a:latin typeface="Yu Gothic UI" pitchFamily="34" charset="0"/>
+                <a:ea typeface="Yu Gothic UI" pitchFamily="34" charset="-122"/>
+                <a:cs typeface="Yu Gothic UI" pitchFamily="34" charset="-120"/>
+              </a:rPr>
+              <a:t>・第15回マスタ表との接続方法が具体的に決まっている</a:t>
+            </a:r>
+            <a:endParaRPr lang="en-US" sz="1400" dirty="0"/>
+          </a:p>
+          <a:p>
+            <a:pPr indent="0" marL="0">
+              <a:spcAft>
+                <a:spcPts val="400"/>
+              </a:spcAft>
+              <a:buNone/>
+            </a:pPr>
+            <a:r>
+              <a:rPr lang="en-US" sz="1400" dirty="0">
+                <a:solidFill>
+                  <a:srgbClr val="1A1A1A"/>
+                </a:solidFill>
+                <a:latin typeface="Yu Gothic UI" pitchFamily="34" charset="0"/>
+                <a:ea typeface="Yu Gothic UI" pitchFamily="34" charset="-122"/>
+                <a:cs typeface="Yu Gothic UI" pitchFamily="34" charset="-120"/>
+              </a:rPr>
+              <a:t>・破綻表現の扱い(悪ではなく "備えのきっかけ")について合意</a:t>
             </a:r>
             <a:endParaRPr lang="en-US" sz="1400" dirty="0"/>
           </a:p>
@@ -2452,47 +2690,67 @@
                 <a:ea typeface="Yu Gothic UI" pitchFamily="34" charset="-122"/>
                 <a:cs typeface="Yu Gothic UI" pitchFamily="34" charset="-120"/>
               </a:rPr>
-              <a:t>・前提条件を曖昧にしない。出典付きが理想。</a:t>
-            </a:r>
-            <a:endParaRPr lang="en-US" sz="1400" dirty="0"/>
-          </a:p>
-          <a:p>
-            <a:pPr indent="0" marL="0">
-              <a:spcAft>
-                <a:spcPts val="400"/>
-              </a:spcAft>
-              <a:buNone/>
-            </a:pPr>
-            <a:r>
-              <a:rPr lang="en-US" sz="1400" dirty="0">
-                <a:solidFill>
-                  <a:srgbClr val="1A1A1A"/>
-                </a:solidFill>
-                <a:latin typeface="Yu Gothic UI" pitchFamily="34" charset="0"/>
-                <a:ea typeface="Yu Gothic UI" pitchFamily="34" charset="-122"/>
-                <a:cs typeface="Yu Gothic UI" pitchFamily="34" charset="-120"/>
-              </a:rPr>
-              <a:t>・計算が複雑すぎると現場で使えない。シンプルに。</a:t>
-            </a:r>
-            <a:endParaRPr lang="en-US" sz="1400" dirty="0"/>
-          </a:p>
-          <a:p>
-            <a:pPr indent="0" marL="0">
-              <a:spcAft>
-                <a:spcPts val="400"/>
-              </a:spcAft>
-              <a:buNone/>
-            </a:pPr>
-            <a:r>
-              <a:rPr lang="en-US" sz="1400" dirty="0">
-                <a:solidFill>
-                  <a:srgbClr val="1A1A1A"/>
-                </a:solidFill>
-                <a:latin typeface="Yu Gothic UI" pitchFamily="34" charset="0"/>
-                <a:ea typeface="Yu Gothic UI" pitchFamily="34" charset="-122"/>
-                <a:cs typeface="Yu Gothic UI" pitchFamily="34" charset="-120"/>
-              </a:rPr>
-              <a:t>・「不足額が大きい=悪」ではない。対策の提案に繋げる流れを意識。</a:t>
+              <a:t>・「AI に何を返してほしいか」を先に決めるのが W02 実装のカギ。</a:t>
+            </a:r>
+            <a:endParaRPr lang="en-US" sz="1400" dirty="0"/>
+          </a:p>
+          <a:p>
+            <a:pPr indent="0" marL="0">
+              <a:spcAft>
+                <a:spcPts val="400"/>
+              </a:spcAft>
+              <a:buNone/>
+            </a:pPr>
+            <a:r>
+              <a:rPr lang="en-US" sz="1400" dirty="0">
+                <a:solidFill>
+                  <a:srgbClr val="1A1A1A"/>
+                </a:solidFill>
+                <a:latin typeface="Yu Gothic UI" pitchFamily="34" charset="0"/>
+                <a:ea typeface="Yu Gothic UI" pitchFamily="34" charset="-122"/>
+                <a:cs typeface="Yu Gothic UI" pitchFamily="34" charset="-120"/>
+              </a:rPr>
+              <a:t>・出力を後から拡張すると 手戻りが大きい(GASの書き出しロジック変更 + プロンプト変更 + スプシレイアウト変更)。</a:t>
+            </a:r>
+            <a:endParaRPr lang="en-US" sz="1400" dirty="0"/>
+          </a:p>
+          <a:p>
+            <a:pPr indent="0" marL="0">
+              <a:spcAft>
+                <a:spcPts val="400"/>
+              </a:spcAft>
+              <a:buNone/>
+            </a:pPr>
+            <a:r>
+              <a:rPr lang="en-US" sz="1400" dirty="0">
+                <a:solidFill>
+                  <a:srgbClr val="1A1A1A"/>
+                </a:solidFill>
+                <a:latin typeface="Yu Gothic UI" pitchFamily="34" charset="0"/>
+                <a:ea typeface="Yu Gothic UI" pitchFamily="34" charset="-122"/>
+                <a:cs typeface="Yu Gothic UI" pitchFamily="34" charset="-120"/>
+              </a:rPr>
+              <a:t>・破綻年の扱いをしくじると 顧客に不安を煽る資料になる。「破綻シナリオ+その対策」のセット提示に。</a:t>
+            </a:r>
+            <a:endParaRPr lang="en-US" sz="1400" dirty="0"/>
+          </a:p>
+          <a:p>
+            <a:pPr indent="0" marL="0">
+              <a:spcAft>
+                <a:spcPts val="400"/>
+              </a:spcAft>
+              <a:buNone/>
+            </a:pPr>
+            <a:r>
+              <a:rPr lang="en-US" sz="1400" dirty="0">
+                <a:solidFill>
+                  <a:srgbClr val="1A1A1A"/>
+                </a:solidFill>
+                <a:latin typeface="Yu Gothic UI" pitchFamily="34" charset="0"/>
+                <a:ea typeface="Yu Gothic UI" pitchFamily="34" charset="-122"/>
+                <a:cs typeface="Yu Gothic UI" pitchFamily="34" charset="-120"/>
+              </a:rPr>
+              <a:t>・「AIが全部やってくれる」錯覚を避ける。数値検証・提案化 は 代理店の仕事。</a:t>
             </a:r>
             <a:endParaRPr lang="en-US" sz="1400" dirty="0"/>
           </a:p>
